--- a/storey-scanner-card.pptx
+++ b/storey-scanner-card.pptx
@@ -1049,7 +1049,7 @@
                 <a:ea typeface="Calibri" pitchFamily="34" charset="-122"/>
                 <a:cs typeface="Calibri" pitchFamily="34" charset="-120"/>
               </a:rPr>
-              <a:t>Scan — we'll send the Storey pack to your WhatsApp.</a:t>
+              <a:t>Scan → download the pack &amp; WhatsApp Karun in one tap.</a:t>
             </a:r>
             <a:endParaRPr lang="en-US" sz="1300" dirty="0"/>
           </a:p>
@@ -1094,7 +1094,7 @@
             </a:avLst>
           </a:prstGeom>
           <a:solidFill>
-            <a:srgbClr val="25D366"/>
+            <a:srgbClr val="B85042"/>
           </a:solidFill>
           <a:ln/>
         </p:spPr>
@@ -1132,7 +1132,7 @@
                 <a:ea typeface="Calibri" pitchFamily="34" charset="-122"/>
                 <a:cs typeface="Calibri" pitchFamily="34" charset="-120"/>
               </a:rPr>
-              <a:t>OPENS WHATSAPP</a:t>
+              <a:t>GET THE PACK</a:t>
             </a:r>
             <a:endParaRPr lang="en-US" sz="1100" dirty="0"/>
           </a:p>
